--- a/Centauro_Arquitectura_Tecnica.pptx
+++ b/Centauro_Arquitectura_Tecnica.pptx
@@ -18649,8 +18649,8 @@
 </file>
 
 <file path=customXml/item1.xml><?xml version="1.0" encoding="utf-8"?>
-<ct:contentTypeSchema xmlns:ct="http://schemas.microsoft.com/office/2006/metadata/contentType" xmlns:ma="http://schemas.microsoft.com/office/2006/metadata/properties/metaAttributes" ct:_="" ma:_="" ma:contentTypeName="Document" ma:contentTypeID="0x010100A62BD1A1B5CAC249A95BCCCA1576DD25" ma:contentTypeVersion="15" ma:contentTypeDescription="Create a new document." ma:contentTypeScope="" ma:versionID="95d80e3e9b41a0cd0f31651385762a39">
-  <xsd:schema xmlns:xsd="http://www.w3.org/2001/XMLSchema" xmlns:xs="http://www.w3.org/2001/XMLSchema" xmlns:p="http://schemas.microsoft.com/office/2006/metadata/properties" xmlns:ns2="e4f8e1ef-7590-4615-a0b0-41d92864fb7e" xmlns:ns3="396b9688-3d64-4f4f-b40d-59fd809f50b1" targetNamespace="http://schemas.microsoft.com/office/2006/metadata/properties" ma:root="true" ma:fieldsID="0c785e827d86c3245c0f7c251e0c72c1" ns2:_="" ns3:_="">
+<ct:contentTypeSchema xmlns:ct="http://schemas.microsoft.com/office/2006/metadata/contentType" xmlns:ma="http://schemas.microsoft.com/office/2006/metadata/properties/metaAttributes" ct:_="" ma:_="" ma:contentTypeName="Documento" ma:contentTypeID="0x010100A62BD1A1B5CAC249A95BCCCA1576DD25" ma:contentTypeVersion="15" ma:contentTypeDescription="Crear nuevo documento." ma:contentTypeScope="" ma:versionID="e7f576afb137e09b84b3a9dd4651f92f">
+  <xsd:schema xmlns:xsd="http://www.w3.org/2001/XMLSchema" xmlns:xs="http://www.w3.org/2001/XMLSchema" xmlns:p="http://schemas.microsoft.com/office/2006/metadata/properties" xmlns:ns2="e4f8e1ef-7590-4615-a0b0-41d92864fb7e" xmlns:ns3="396b9688-3d64-4f4f-b40d-59fd809f50b1" targetNamespace="http://schemas.microsoft.com/office/2006/metadata/properties" ma:root="true" ma:fieldsID="81da8bc2beca58c86a5d31f30ec09267" ns2:_="" ns3:_="">
     <xsd:import namespace="e4f8e1ef-7590-4615-a0b0-41d92864fb7e"/>
     <xsd:import namespace="396b9688-3d64-4f4f-b40d-59fd809f50b1"/>
     <xsd:element name="properties">
@@ -18708,7 +18708,7 @@
         <xsd:restriction base="dms:Text"/>
       </xsd:simpleType>
     </xsd:element>
-    <xsd:element name="lcf76f155ced4ddcb4097134ff3c332f" ma:index="16" nillable="true" ma:taxonomy="true" ma:internalName="lcf76f155ced4ddcb4097134ff3c332f" ma:taxonomyFieldName="MediaServiceImageTags" ma:displayName="Image Tags" ma:readOnly="false" ma:fieldId="{5cf76f15-5ced-4ddc-b409-7134ff3c332f}" ma:taxonomyMulti="true" ma:sspId="0e055066-1d0b-4836-b0e5-54071a0012ab" ma:termSetId="09814cd3-568e-fe90-9814-8d621ff8fb84" ma:anchorId="fba54fb3-c3e1-fe81-a776-ca4b69148c4d" ma:open="true" ma:isKeyword="false">
+    <xsd:element name="lcf76f155ced4ddcb4097134ff3c332f" ma:index="16" nillable="true" ma:taxonomy="true" ma:internalName="lcf76f155ced4ddcb4097134ff3c332f" ma:taxonomyFieldName="MediaServiceImageTags" ma:displayName="Etiquetas de imagen" ma:readOnly="false" ma:fieldId="{5cf76f15-5ced-4ddc-b409-7134ff3c332f}" ma:taxonomyMulti="true" ma:sspId="0e055066-1d0b-4836-b0e5-54071a0012ab" ma:termSetId="09814cd3-568e-fe90-9814-8d621ff8fb84" ma:anchorId="fba54fb3-c3e1-fe81-a776-ca4b69148c4d" ma:open="true" ma:isKeyword="false">
       <xsd:complexType>
         <xsd:sequence>
           <xsd:element ref="pc:Terms" minOccurs="0" maxOccurs="1"/>
@@ -18746,7 +18746,7 @@
   <xsd:schema xmlns:xsd="http://www.w3.org/2001/XMLSchema" xmlns:xs="http://www.w3.org/2001/XMLSchema" xmlns:dms="http://schemas.microsoft.com/office/2006/documentManagement/types" xmlns:pc="http://schemas.microsoft.com/office/infopath/2007/PartnerControls" targetNamespace="396b9688-3d64-4f4f-b40d-59fd809f50b1" elementFormDefault="qualified">
     <xsd:import namespace="http://schemas.microsoft.com/office/2006/documentManagement/types"/>
     <xsd:import namespace="http://schemas.microsoft.com/office/infopath/2007/PartnerControls"/>
-    <xsd:element name="SharedWithUsers" ma:index="10" nillable="true" ma:displayName="Shared With" ma:internalName="SharedWithUsers" ma:readOnly="true">
+    <xsd:element name="SharedWithUsers" ma:index="10" nillable="true" ma:displayName="Compartido con" ma:internalName="SharedWithUsers" ma:readOnly="true">
       <xsd:complexType>
         <xsd:complexContent>
           <xsd:extension base="dms:UserMulti">
@@ -18765,7 +18765,7 @@
         </xsd:complexContent>
       </xsd:complexType>
     </xsd:element>
-    <xsd:element name="SharedWithDetails" ma:index="11" nillable="true" ma:displayName="Shared With Details" ma:internalName="SharedWithDetails" ma:readOnly="true">
+    <xsd:element name="SharedWithDetails" ma:index="11" nillable="true" ma:displayName="Detalles de uso compartido" ma:internalName="SharedWithDetails" ma:readOnly="true">
       <xsd:simpleType>
         <xsd:restriction base="dms:Note">
           <xsd:maxLength value="255"/>
@@ -18793,8 +18793,8 @@
         <xsd:element ref="dc:creator" minOccurs="0" maxOccurs="1"/>
         <xsd:element ref="dcterms:created" minOccurs="0" maxOccurs="1"/>
         <xsd:element ref="dc:identifier" minOccurs="0" maxOccurs="1"/>
-        <xsd:element name="contentType" minOccurs="0" maxOccurs="1" type="xsd:string" ma:index="0" ma:displayName="Content Type"/>
-        <xsd:element ref="dc:title" minOccurs="0" maxOccurs="1" ma:index="4" ma:displayName="Title"/>
+        <xsd:element name="contentType" minOccurs="0" maxOccurs="1" type="xsd:string" ma:index="0" ma:displayName="Tipo de contenido"/>
+        <xsd:element ref="dc:title" minOccurs="0" maxOccurs="1" ma:index="4" ma:displayName="Título"/>
         <xsd:element ref="dc:subject" minOccurs="0" maxOccurs="1"/>
         <xsd:element ref="dc:description" minOccurs="0" maxOccurs="1"/>
         <xsd:element name="keywords" minOccurs="0" maxOccurs="1" type="xsd:string"/>
@@ -18904,22 +18904,7 @@
 </file>
 
 <file path=customXml/itemProps1.xml><?xml version="1.0" encoding="utf-8"?>
-<ds:datastoreItem xmlns:ds="http://schemas.openxmlformats.org/officeDocument/2006/customXml" ds:itemID="{AB318811-B8F7-4617-96D1-5C7588638431}">
-  <ds:schemaRefs>
-    <ds:schemaRef ds:uri="http://schemas.microsoft.com/office/2006/metadata/contentType"/>
-    <ds:schemaRef ds:uri="http://schemas.microsoft.com/office/2006/metadata/properties/metaAttributes"/>
-    <ds:schemaRef ds:uri="http://www.w3.org/2001/XMLSchema"/>
-    <ds:schemaRef ds:uri="http://schemas.microsoft.com/office/2006/metadata/properties"/>
-    <ds:schemaRef ds:uri="e4f8e1ef-7590-4615-a0b0-41d92864fb7e"/>
-    <ds:schemaRef ds:uri="396b9688-3d64-4f4f-b40d-59fd809f50b1"/>
-    <ds:schemaRef ds:uri="http://schemas.microsoft.com/office/2006/documentManagement/types"/>
-    <ds:schemaRef ds:uri="http://schemas.microsoft.com/office/infopath/2007/PartnerControls"/>
-    <ds:schemaRef ds:uri="http://schemas.openxmlformats.org/package/2006/metadata/core-properties"/>
-    <ds:schemaRef ds:uri="http://purl.org/dc/elements/1.1/"/>
-    <ds:schemaRef ds:uri="http://purl.org/dc/terms/"/>
-    <ds:schemaRef ds:uri="http://schemas.microsoft.com/internal/obd"/>
-  </ds:schemaRefs>
-</ds:datastoreItem>
+<ds:datastoreItem xmlns:ds="http://schemas.openxmlformats.org/officeDocument/2006/customXml" ds:itemID="{106B4801-8CE3-4FC0-8290-77720E935DAB}"/>
 </file>
 
 <file path=customXml/itemProps2.xml><?xml version="1.0" encoding="utf-8"?>
